--- a/decks/launch-red-zone-lesson-v2.pptx
+++ b/decks/launch-red-zone-lesson-v2.pptx
@@ -583,7 +583,7 @@
           <a:lstStyle/>
           <a:p>
             <a:r>
-              <a:t>Keep your tone steady and warm, without making it a joke. This lesson is best co-led with a counselor, or with one nearby.</a:t>
+              <a:t>Keep your tone steady and warm, without making it a joke.</a:t>
             </a:r>
           </a:p>
         </p:txBody>
@@ -653,7 +653,7 @@
           <a:lstStyle/>
           <a:p>
             <a:r>
-              <a:t>3 MINUTES. Say it slowly: "This lesson talks about sexual assault. Some people in any room have experienced it, at home, at school, in a relationship. Not because of what you drank, wore, said or didn't say. If you need to step out, go; a counselor is available." Pause before moving on.</a:t>
+              <a:t>3 MINUTES. Say it slowly: "This lesson talks about sexual assault. Some people in any room have experienced it, at home, at school, in a relationship. Not because of what you drank, wore, said or didn't say. If you need to step out, go; I'll check in with you after." Pause before moving on.</a:t>
             </a:r>
           </a:p>
         </p:txBody>
@@ -1003,7 +1003,7 @@
           <a:lstStyle/>
           <a:p>
             <a:r>
-              <a:t>2 MINUTES. Share the student page link. Remind students that counselors, health staff and advocates are usually confidential, and RAs often aren't. RAINN: 800-656-4673 or rainn.org, any time. Close with: "If anything today brought something up for you, a counselor is here, today or any day." Stay in the room for a few minutes after.</a:t>
+              <a:t>2 MINUTES. Share the student page link. Remind students that counselors, health staff and advocates are usually confidential, and RAs often aren't. RAINN: 800-656-4673 or rainn.org, any time. Close with: "If anything today brought something up for you, come find me, today or any day." Stay in the room for a few minutes after.</a:t>
             </a:r>
           </a:p>
         </p:txBody>
@@ -4298,7 +4298,7 @@
                 </a:solidFill>
                 <a:latin typeface="Source Serif 4"/>
               </a:rPr>
-              <a:t>Students learn why the first months of college carry higher risk, why people don't step in, four ways to step in, and what to say if a friend tells them. Say at the start that some students may have experienced assault and anyone can step out, never discuss what a victim should have done, and have a counselor available afterward.</a:t>
+              <a:t>Students learn why the first months of college carry higher risk, why people don't step in, four ways to step in, and what to say if a friend tells them. Say at the start that some students may have experienced assault and anyone can step out, and never discuss what a victim should have done.</a:t>
             </a:r>
           </a:p>
           <a:p>
@@ -4549,7 +4549,7 @@
                 </a:solidFill>
                 <a:latin typeface="Source Serif 4"/>
               </a:rPr>
-              <a:t>Assume someone in the room has, at home, at school or in a relationship. Say so at the start, say it was not their fault, and say anyone can step out without explaining. Best co-led with a counselor or with one nearby.</a:t>
+              <a:t>Assume someone in the room has, at home, at school or in a relationship. Say so at the start, say it was not their fault, and say anyone can step out without explaining. Check in later with anyone who leaves.</a:t>
             </a:r>
           </a:p>
           <a:p>
@@ -4812,7 +4812,7 @@
                 </a:solidFill>
                 <a:latin typeface="Source Serif 4"/>
               </a:rPr>
-              <a:t>If a student discloses, believe them, thank them, and walk them to a counselor that day. Don't investigate or promise secrecy you can't keep.</a:t>
+              <a:t>If a student discloses, believe them, thank them, and follow up one on one that day. State your reporting limits up front, and don't promise secrecy you can't keep.</a:t>
             </a:r>
           </a:p>
           <a:p>
@@ -8578,22 +8578,6 @@
                 </a:solidFill>
                 <a:latin typeface="Source Serif 4"/>
               </a:rPr>
-              <a:t>A counselor available during or right after the lesson</a:t>
-            </a:r>
-          </a:p>
-          <a:p>
-            <a:pPr algn="l">
-              <a:spcAft>
-                <a:spcPts val="675"/>
-              </a:spcAft>
-            </a:pPr>
-            <a:r>
-              <a:rPr sz="1500" b="0" i="0">
-                <a:solidFill>
-                  <a:srgbClr val="1C1B19"/>
-                </a:solidFill>
-                <a:latin typeface="Source Serif 4"/>
-              </a:rPr>
               <a:t>The student page link (last slide) to share afterward</a:t>
             </a:r>
           </a:p>
@@ -8831,7 +8815,7 @@
                 </a:solidFill>
                 <a:latin typeface="Source Serif 4"/>
               </a:rPr>
-              <a:t>Before we start (2), the four Ds (3), Mateo at the party (3), what to say first (2). Have a counselor in the room.</a:t>
+              <a:t>Before we start (2), the four Ds (3), Mateo at the party (3), what to say first (2).</a:t>
             </a:r>
           </a:p>
         </p:txBody>

--- a/decks/launch-red-zone-lesson-v2.pptx
+++ b/decks/launch-red-zone-lesson-v2.pptx
@@ -6033,6 +6033,45 @@
                 <a:latin typeface="Inter Tight"/>
               </a:rPr>
               <a:t>Beaver Upper School · Counseling</a:t>
+            </a:r>
+          </a:p>
+        </p:txBody>
+      </p:sp>
+      <p:sp>
+        <p:nvSpPr>
+          <p:cNvPr id="8" name="TextBox 7"/>
+          <p:cNvSpPr txBox="1"/>
+          <p:nvPr/>
+        </p:nvSpPr>
+        <p:spPr>
+          <a:xfrm>
+            <a:off x="6766560" y="5897880"/>
+            <a:ext cx="4846320" cy="640080"/>
+          </a:xfrm>
+          <a:prstGeom prst="rect">
+            <a:avLst/>
+          </a:prstGeom>
+          <a:noFill/>
+        </p:spPr>
+        <p:txBody>
+          <a:bodyPr wrap="square" anchor="t" lIns="0" rIns="0" tIns="0" bIns="0">
+            <a:spAutoFit/>
+          </a:bodyPr>
+          <a:lstStyle/>
+          <a:p>
+            <a:pPr algn="r">
+              <a:spcAft>
+                <a:spcPts val="495"/>
+              </a:spcAft>
+            </a:pPr>
+            <a:r>
+              <a:rPr sz="1100" b="0" i="0">
+                <a:solidFill>
+                  <a:srgbClr val="E8E4DA"/>
+                </a:solidFill>
+                <a:latin typeface="Inter Tight"/>
+              </a:rPr>
+              <a:t>Written by Dr. Rick Wilson, with AI-assisted drafting. Every lesson is reviewed and edited by Dr. Wilson.</a:t>
             </a:r>
           </a:p>
         </p:txBody>
